--- a/04_Result/presentation.pptx
+++ b/04_Result/presentation.pptx
@@ -3576,21 +3576,21 @@
           <p:nvPr>
             <p:extLst>
               <p:ext uri="{D42A27DB-BD31-4B8C-83A1-F6EECF244321}">
-                <p14:modId xmlns:p14="http://schemas.microsoft.com/office/powerpoint/2010/main" val="1579011935"/>
+                <p14:modId xmlns:p14="http://schemas.microsoft.com/office/powerpoint/2010/main" val="2353278841"/>
               </p:ext>
             </p:extLst>
           </p:nvPr>
         </p:nvGraphicFramePr>
         <p:xfrm>
           <a:off x="9048902" y="3524098"/>
-          <a:ext cx="8096097" cy="3432046"/>
+          <a:ext cx="7039813" cy="3432046"/>
         </p:xfrm>
         <a:graphic>
           <a:graphicData uri="http://schemas.openxmlformats.org/drawingml/2006/table">
             <a:tbl>
               <a:tblPr/>
               <a:tblGrid>
-                <a:gridCol w="2788920">
+                <a:gridCol w="1732636">
                   <a:extLst>
                     <a:ext uri="{9D8B030D-6E8A-4147-A177-3AD203B41FA5}">
                       <a16:colId xmlns:a16="http://schemas.microsoft.com/office/drawing/2014/main" val="20000"/>
@@ -5551,7 +5551,7 @@
                 <a:ea typeface="Inter" pitchFamily="34" charset="-122"/>
                 <a:cs typeface="Inter" pitchFamily="34" charset="-120"/>
               </a:rPr>
-              <a:t>Text normalisation</a:t>
+              <a:t>Text normalization</a:t>
             </a:r>
             <a:endParaRPr lang="en-US" sz="1600" dirty="0"/>
           </a:p>
@@ -9304,7 +9304,7 @@
         </p:nvSpPr>
         <p:spPr>
           <a:xfrm>
-            <a:off x="9048902" y="3619195"/>
+            <a:off x="8981316" y="3629549"/>
             <a:ext cx="8097012" cy="705002"/>
           </a:xfrm>
           <a:prstGeom prst="rect">
@@ -9398,7 +9398,7 @@
         </p:nvSpPr>
         <p:spPr>
           <a:xfrm>
-            <a:off x="9048902" y="4505249"/>
+            <a:off x="8962035" y="4515602"/>
             <a:ext cx="8097012" cy="705002"/>
           </a:xfrm>
           <a:prstGeom prst="rect">
@@ -11579,52 +11579,6 @@
           </a:p>
         </p:txBody>
       </p:sp>
-      <p:pic>
-        <p:nvPicPr>
-          <p:cNvPr id="11" name="Image 2" descr="gen-dedup-79fdbdde133079048f8fa24240b8cf99.png"/>
-          <p:cNvPicPr>
-            <a:picLocks noChangeAspect="1"/>
-          </p:cNvPicPr>
-          <p:nvPr/>
-        </p:nvPicPr>
-        <p:blipFill>
-          <a:blip r:embed="rId5"/>
-          <a:srcRect t="-8333" b="-8333"/>
-          <a:stretch/>
-        </p:blipFill>
-        <p:spPr>
-          <a:xfrm>
-            <a:off x="1143000" y="3212477"/>
-            <a:ext cx="4572000" cy="4572000"/>
-          </a:xfrm>
-          <a:prstGeom prst="rect">
-            <a:avLst/>
-          </a:prstGeom>
-        </p:spPr>
-      </p:pic>
-      <p:pic>
-        <p:nvPicPr>
-          <p:cNvPr id="12" name="Image 3" descr="gen-dedup-0514b4532bbf023881c5d201ea8db2fe.png"/>
-          <p:cNvPicPr>
-            <a:picLocks noChangeAspect="1"/>
-          </p:cNvPicPr>
-          <p:nvPr/>
-        </p:nvPicPr>
-        <p:blipFill>
-          <a:blip r:embed="rId6"/>
-          <a:srcRect t="-8333" b="-8333"/>
-          <a:stretch/>
-        </p:blipFill>
-        <p:spPr>
-          <a:xfrm>
-            <a:off x="6858000" y="3047695"/>
-            <a:ext cx="5333695" cy="5333695"/>
-          </a:xfrm>
-          <a:prstGeom prst="rect">
-            <a:avLst/>
-          </a:prstGeom>
-        </p:spPr>
-      </p:pic>
       <p:sp>
         <p:nvSpPr>
           <p:cNvPr id="13" name="Text 7"/>
@@ -12027,6 +11981,36 @@
           </a:p>
         </p:txBody>
       </p:sp>
+      <p:pic>
+        <p:nvPicPr>
+          <p:cNvPr id="24" name="Picture 23">
+            <a:extLst>
+              <a:ext uri="{FF2B5EF4-FFF2-40B4-BE49-F238E27FC236}">
+                <a16:creationId xmlns:a16="http://schemas.microsoft.com/office/drawing/2014/main" id="{90441A54-CFD5-FA5A-82F8-567769E95B14}"/>
+              </a:ext>
+            </a:extLst>
+          </p:cNvPr>
+          <p:cNvPicPr>
+            <a:picLocks noChangeAspect="1"/>
+          </p:cNvPicPr>
+          <p:nvPr/>
+        </p:nvPicPr>
+        <p:blipFill>
+          <a:blip r:embed="rId5"/>
+          <a:stretch>
+            <a:fillRect/>
+          </a:stretch>
+        </p:blipFill>
+        <p:spPr>
+          <a:xfrm>
+            <a:off x="1143000" y="2771547"/>
+            <a:ext cx="9405292" cy="5764865"/>
+          </a:xfrm>
+          <a:prstGeom prst="rect">
+            <a:avLst/>
+          </a:prstGeom>
+        </p:spPr>
+      </p:pic>
     </p:spTree>
   </p:cSld>
   <p:clrMapOvr>
@@ -12120,7 +12104,7 @@
         </p:blipFill>
         <p:spPr>
           <a:xfrm>
-            <a:off x="2113613" y="3259823"/>
+            <a:off x="2019020" y="3259822"/>
             <a:ext cx="4478625" cy="4478625"/>
           </a:xfrm>
           <a:prstGeom prst="rect">
@@ -12128,12 +12112,113 @@
           </a:prstGeom>
         </p:spPr>
       </p:pic>
+      <p:sp>
+        <p:nvSpPr>
+          <p:cNvPr id="8" name="Text 4">
+            <a:extLst>
+              <a:ext uri="{FF2B5EF4-FFF2-40B4-BE49-F238E27FC236}">
+                <a16:creationId xmlns:a16="http://schemas.microsoft.com/office/drawing/2014/main" id="{95609E97-C918-E3AD-43CD-1C9DBFE92020}"/>
+              </a:ext>
+            </a:extLst>
+          </p:cNvPr>
+          <p:cNvSpPr txBox="1"/>
+          <p:nvPr/>
+        </p:nvSpPr>
+        <p:spPr>
+          <a:xfrm>
+            <a:off x="507546" y="1828028"/>
+            <a:ext cx="7690758" cy="724205"/>
+          </a:xfrm>
+          <a:prstGeom prst="rect">
+            <a:avLst/>
+          </a:prstGeom>
+          <a:noFill/>
+          <a:ln/>
+        </p:spPr>
+        <p:txBody>
+          <a:bodyPr wrap="none" lIns="0" tIns="0" rIns="0" bIns="0" rtlCol="0" anchor="ctr"/>
+          <a:lstStyle/>
+          <a:p>
+            <a:pPr marL="0" indent="0" algn="ctr">
+              <a:buNone/>
+            </a:pPr>
+            <a:r>
+              <a:rPr lang="en-US" sz="5400" b="1" kern="0" spc="-75" dirty="0">
+                <a:solidFill>
+                  <a:srgbClr val="FFFFFF"/>
+                </a:solidFill>
+                <a:latin typeface="Source Serif 4" pitchFamily="34" charset="0"/>
+                <a:ea typeface="Source Serif 4" pitchFamily="34" charset="-122"/>
+                <a:cs typeface="Source Serif 4" pitchFamily="34" charset="-120"/>
+              </a:rPr>
+              <a:t>Demo with Azure</a:t>
+            </a:r>
+            <a:endParaRPr lang="en-US" sz="5400" dirty="0"/>
+          </a:p>
+        </p:txBody>
+      </p:sp>
+      <p:sp>
+        <p:nvSpPr>
+          <p:cNvPr id="9" name="Text 4">
+            <a:extLst>
+              <a:ext uri="{FF2B5EF4-FFF2-40B4-BE49-F238E27FC236}">
+                <a16:creationId xmlns:a16="http://schemas.microsoft.com/office/drawing/2014/main" id="{2654DDFD-8D15-6B72-52AF-06D2E32EA852}"/>
+              </a:ext>
+            </a:extLst>
+          </p:cNvPr>
+          <p:cNvSpPr txBox="1"/>
+          <p:nvPr/>
+        </p:nvSpPr>
+        <p:spPr>
+          <a:xfrm>
+            <a:off x="11346996" y="1828028"/>
+            <a:ext cx="5176158" cy="724205"/>
+          </a:xfrm>
+          <a:prstGeom prst="rect">
+            <a:avLst/>
+          </a:prstGeom>
+          <a:noFill/>
+          <a:ln/>
+        </p:spPr>
+        <p:txBody>
+          <a:bodyPr wrap="none" lIns="0" tIns="0" rIns="0" bIns="0" rtlCol="0" anchor="ctr"/>
+          <a:lstStyle/>
+          <a:p>
+            <a:pPr marL="0" indent="0" algn="ctr">
+              <a:buNone/>
+            </a:pPr>
+            <a:r>
+              <a:rPr lang="en-US" sz="5400" b="1" kern="0" spc="-75" dirty="0">
+                <a:solidFill>
+                  <a:srgbClr val="FFFFFF"/>
+                </a:solidFill>
+                <a:latin typeface="Source Serif 4" pitchFamily="34" charset="0"/>
+                <a:ea typeface="Source Serif 4" pitchFamily="34" charset="-122"/>
+                <a:cs typeface="Source Serif 4" pitchFamily="34" charset="-120"/>
+              </a:rPr>
+              <a:t>Demo with </a:t>
+            </a:r>
+            <a:r>
+              <a:rPr lang="en-US" sz="5400" b="1" kern="0" spc="-75" dirty="0" err="1">
+                <a:solidFill>
+                  <a:srgbClr val="FFFFFF"/>
+                </a:solidFill>
+                <a:latin typeface="Source Serif 4" pitchFamily="34" charset="0"/>
+                <a:ea typeface="Source Serif 4" pitchFamily="34" charset="-122"/>
+                <a:cs typeface="Source Serif 4" pitchFamily="34" charset="-120"/>
+              </a:rPr>
+              <a:t>Pyhton</a:t>
+            </a:r>
+            <a:endParaRPr lang="en-US" sz="5400" dirty="0"/>
+          </a:p>
+        </p:txBody>
+      </p:sp>
       <p:pic>
         <p:nvPicPr>
-          <p:cNvPr id="6" name="Graphic 5">
+          <p:cNvPr id="3" name="Graphic 2">
             <a:extLst>
               <a:ext uri="{FF2B5EF4-FFF2-40B4-BE49-F238E27FC236}">
-                <a16:creationId xmlns:a16="http://schemas.microsoft.com/office/drawing/2014/main" id="{1108BF85-5834-9D22-0F28-CA0EABC8580C}"/>
+                <a16:creationId xmlns:a16="http://schemas.microsoft.com/office/drawing/2014/main" id="{949D98FF-9E8F-7C09-2492-52CF82D4292C}"/>
               </a:ext>
             </a:extLst>
           </p:cNvPr>
@@ -12146,7 +12231,7 @@
           <a:blip>
             <a:extLst>
               <a:ext uri="{96DAC541-7B7A-43D3-8B79-37D633B846F1}">
-                <asvg:svgBlip xmlns:asvg="http://schemas.microsoft.com/office/drawing/2016/SVG/main" r:embed="rId3"/>
+                <asvg:svgBlip xmlns:asvg="http://schemas.microsoft.com/office/drawing/2016/SVG/main" r:embed="rId2"/>
               </a:ext>
             </a:extLst>
           </a:blip>
@@ -12156,104 +12241,14 @@
         </p:blipFill>
         <p:spPr>
           <a:xfrm>
-            <a:off x="11695763" y="3259824"/>
-            <a:ext cx="4478624" cy="4478624"/>
+            <a:off x="11590659" y="3259823"/>
+            <a:ext cx="4478625" cy="4478625"/>
           </a:xfrm>
           <a:prstGeom prst="rect">
             <a:avLst/>
           </a:prstGeom>
         </p:spPr>
       </p:pic>
-      <p:sp>
-        <p:nvSpPr>
-          <p:cNvPr id="8" name="Text 4">
-            <a:extLst>
-              <a:ext uri="{FF2B5EF4-FFF2-40B4-BE49-F238E27FC236}">
-                <a16:creationId xmlns:a16="http://schemas.microsoft.com/office/drawing/2014/main" id="{95609E97-C918-E3AD-43CD-1C9DBFE92020}"/>
-              </a:ext>
-            </a:extLst>
-          </p:cNvPr>
-          <p:cNvSpPr txBox="1"/>
-          <p:nvPr/>
-        </p:nvSpPr>
-        <p:spPr>
-          <a:xfrm>
-            <a:off x="507546" y="1828028"/>
-            <a:ext cx="7690758" cy="724205"/>
-          </a:xfrm>
-          <a:prstGeom prst="rect">
-            <a:avLst/>
-          </a:prstGeom>
-          <a:noFill/>
-          <a:ln/>
-        </p:spPr>
-        <p:txBody>
-          <a:bodyPr wrap="none" lIns="0" tIns="0" rIns="0" bIns="0" rtlCol="0" anchor="ctr"/>
-          <a:lstStyle/>
-          <a:p>
-            <a:pPr marL="0" indent="0" algn="ctr">
-              <a:buNone/>
-            </a:pPr>
-            <a:r>
-              <a:rPr lang="en-US" sz="5400" b="1" kern="0" spc="-75" dirty="0">
-                <a:solidFill>
-                  <a:srgbClr val="FFFFFF"/>
-                </a:solidFill>
-                <a:latin typeface="Source Serif 4" pitchFamily="34" charset="0"/>
-                <a:ea typeface="Source Serif 4" pitchFamily="34" charset="-122"/>
-                <a:cs typeface="Source Serif 4" pitchFamily="34" charset="-120"/>
-              </a:rPr>
-              <a:t>Demo with Azure</a:t>
-            </a:r>
-            <a:endParaRPr lang="en-US" sz="5400" dirty="0"/>
-          </a:p>
-        </p:txBody>
-      </p:sp>
-      <p:sp>
-        <p:nvSpPr>
-          <p:cNvPr id="9" name="Text 4">
-            <a:extLst>
-              <a:ext uri="{FF2B5EF4-FFF2-40B4-BE49-F238E27FC236}">
-                <a16:creationId xmlns:a16="http://schemas.microsoft.com/office/drawing/2014/main" id="{2654DDFD-8D15-6B72-52AF-06D2E32EA852}"/>
-              </a:ext>
-            </a:extLst>
-          </p:cNvPr>
-          <p:cNvSpPr txBox="1"/>
-          <p:nvPr/>
-        </p:nvSpPr>
-        <p:spPr>
-          <a:xfrm>
-            <a:off x="11346996" y="1828028"/>
-            <a:ext cx="5176158" cy="724205"/>
-          </a:xfrm>
-          <a:prstGeom prst="rect">
-            <a:avLst/>
-          </a:prstGeom>
-          <a:noFill/>
-          <a:ln/>
-        </p:spPr>
-        <p:txBody>
-          <a:bodyPr wrap="none" lIns="0" tIns="0" rIns="0" bIns="0" rtlCol="0" anchor="ctr"/>
-          <a:lstStyle/>
-          <a:p>
-            <a:pPr marL="0" indent="0" algn="ctr">
-              <a:buNone/>
-            </a:pPr>
-            <a:r>
-              <a:rPr lang="en-US" sz="5400" b="1" kern="0" spc="-75" dirty="0">
-                <a:solidFill>
-                  <a:srgbClr val="FFFFFF"/>
-                </a:solidFill>
-                <a:latin typeface="Source Serif 4" pitchFamily="34" charset="0"/>
-                <a:ea typeface="Source Serif 4" pitchFamily="34" charset="-122"/>
-                <a:cs typeface="Source Serif 4" pitchFamily="34" charset="-120"/>
-              </a:rPr>
-              <a:t>Demo with Native</a:t>
-            </a:r>
-            <a:endParaRPr lang="en-US" sz="5400" dirty="0"/>
-          </a:p>
-        </p:txBody>
-      </p:sp>
     </p:spTree>
     <p:extLst>
       <p:ext uri="{BB962C8B-B14F-4D97-AF65-F5344CB8AC3E}">
@@ -15961,7 +15956,7 @@
               <a:t>02 </a:t>
             </a:r>
             <a:r>
-              <a:rPr lang="en-US" sz="1800" dirty="0" err="1">
+              <a:rPr lang="en-US" sz="1800" dirty="0">
                 <a:solidFill>
                   <a:srgbClr val="0E1726"/>
                 </a:solidFill>
@@ -15969,18 +15964,7 @@
                 <a:ea typeface="Inter" pitchFamily="34" charset="-122"/>
                 <a:cs typeface="Inter" pitchFamily="34" charset="-120"/>
               </a:rPr>
-              <a:t>Systematise</a:t>
-            </a:r>
-            <a:r>
-              <a:rPr lang="en-US" sz="1800" dirty="0">
-                <a:solidFill>
-                  <a:srgbClr val="0E1726"/>
-                </a:solidFill>
-                <a:latin typeface="Inter" pitchFamily="34" charset="0"/>
-                <a:ea typeface="Inter" pitchFamily="34" charset="-122"/>
-                <a:cs typeface="Inter" pitchFamily="34" charset="-120"/>
-              </a:rPr>
-              <a:t> the phonological and prosodic features of Azerbaijani relevant to TTS.</a:t>
+              <a:t>Systematize the phonological and prosodic features of Azerbaijani relevant to TTS.</a:t>
             </a:r>
             <a:endParaRPr lang="en-US" sz="1200" dirty="0"/>
           </a:p>
@@ -16804,9 +16788,6 @@
           <a:bodyPr wrap="none" lIns="0" tIns="0" rIns="0" bIns="0" rtlCol="0" anchor="ctr"/>
           <a:lstStyle/>
           <a:p>
-            <a:pPr marL="0" indent="0" algn="l">
-              <a:buNone/>
-            </a:pPr>
             <a:r>
               <a:rPr lang="en-US" sz="2200" b="1" dirty="0">
                 <a:solidFill>
@@ -16816,7 +16797,7 @@
                 <a:ea typeface="Source Serif 4" pitchFamily="34" charset="-122"/>
                 <a:cs typeface="Source Serif 4" pitchFamily="34" charset="-120"/>
               </a:rPr>
-              <a:t>A11Y</a:t>
+              <a:t>Accessibility</a:t>
             </a:r>
             <a:endParaRPr lang="en-US" sz="2200" dirty="0"/>
           </a:p>
@@ -17478,7 +17459,7 @@
           <p:nvPr>
             <p:extLst>
               <p:ext uri="{D42A27DB-BD31-4B8C-83A1-F6EECF244321}">
-                <p14:modId xmlns:p14="http://schemas.microsoft.com/office/powerpoint/2010/main" val="1579011935"/>
+                <p14:modId xmlns:p14="http://schemas.microsoft.com/office/powerpoint/2010/main" val="2230173861"/>
               </p:ext>
             </p:extLst>
           </p:nvPr>
@@ -17893,7 +17874,7 @@
                           <a:ea typeface="Source Serif 4" pitchFamily="34" charset="-122"/>
                           <a:cs typeface="Source Serif 4" pitchFamily="34" charset="-120"/>
                         </a:rPr>
-                        <a:t>Formant</a:t>
+                        <a:t>Formant </a:t>
                       </a:r>
                       <a:endParaRPr lang="en-US" sz="1200" dirty="0"/>
                     </a:p>
@@ -17957,7 +17938,29 @@
                           <a:ea typeface="Inter" pitchFamily="34" charset="-122"/>
                           <a:cs typeface="Inter" pitchFamily="34" charset="-120"/>
                         </a:rPr>
-                        <a:t>DECtalk, MITalk</a:t>
+                        <a:t>DECtalk, </a:t>
+                      </a:r>
+                      <a:r>
+                        <a:rPr lang="en-US" sz="1650" dirty="0" err="1">
+                          <a:solidFill>
+                            <a:srgbClr val="2B3A4D"/>
+                          </a:solidFill>
+                          <a:latin typeface="Inter" pitchFamily="34" charset="0"/>
+                          <a:ea typeface="Inter" pitchFamily="34" charset="-122"/>
+                          <a:cs typeface="Inter" pitchFamily="34" charset="-120"/>
+                        </a:rPr>
+                        <a:t>MITalk</a:t>
+                      </a:r>
+                      <a:r>
+                        <a:rPr lang="en-US" sz="1650" dirty="0">
+                          <a:solidFill>
+                            <a:srgbClr val="2B3A4D"/>
+                          </a:solidFill>
+                          <a:latin typeface="Inter" pitchFamily="34" charset="0"/>
+                          <a:ea typeface="Inter" pitchFamily="34" charset="-122"/>
+                          <a:cs typeface="Inter" pitchFamily="34" charset="-120"/>
+                        </a:rPr>
+                        <a:t> (Mathematic way)</a:t>
                       </a:r>
                       <a:endParaRPr lang="en-US" sz="1650" dirty="0">
                         <a:latin typeface="Inter" charset="0"/>
@@ -18297,7 +18300,7 @@
                           <a:ea typeface="Inter" pitchFamily="34" charset="-122"/>
                           <a:cs typeface="Inter" pitchFamily="34" charset="-120"/>
                         </a:rPr>
-                        <a:t>Festival</a:t>
+                        <a:t>Festival (real voice cutting)</a:t>
                       </a:r>
                       <a:endParaRPr lang="en-US" sz="1650" dirty="0">
                         <a:latin typeface="Inter" charset="0"/>
@@ -18628,7 +18631,7 @@
                           <a:ea typeface="Inter" pitchFamily="34" charset="-122"/>
                           <a:cs typeface="Inter" pitchFamily="34" charset="-120"/>
                         </a:rPr>
-                        <a:t>HTS</a:t>
+                        <a:t>HTS (Hidden Markov Model, still need huge data)</a:t>
                       </a:r>
                       <a:endParaRPr lang="en-US" sz="1650" dirty="0">
                         <a:latin typeface="Inter" charset="0"/>
@@ -18956,9 +18959,6 @@
                     <a:bodyPr/>
                     <a:lstStyle/>
                     <a:p>
-                      <a:pPr marL="0" indent="0">
-                        <a:buNone/>
-                      </a:pPr>
                       <a:r>
                         <a:rPr lang="en-US" sz="1650" dirty="0">
                           <a:solidFill>
@@ -18968,7 +18968,30 @@
                           <a:ea typeface="Inter" pitchFamily="34" charset="-122"/>
                           <a:cs typeface="Inter" pitchFamily="34" charset="-120"/>
                         </a:rPr>
-                        <a:t>Tacotron, VITS</a:t>
+                        <a:t>Tacotron, VITS (</a:t>
+                      </a:r>
+                      <a:r>
+                        <a:rPr lang="en-AZ" sz="1800" b="0" i="0" kern="1200" dirty="0">
+                          <a:solidFill>
+                            <a:schemeClr val="tx1"/>
+                          </a:solidFill>
+                          <a:effectLst/>
+                          <a:latin typeface="+mn-lt"/>
+                          <a:ea typeface="+mn-ea"/>
+                          <a:cs typeface="+mn-cs"/>
+                        </a:rPr>
+                        <a:t>20+ hours of clean, labelled speech</a:t>
+                      </a:r>
+                      <a:r>
+                        <a:rPr lang="en-US" sz="1650" dirty="0">
+                          <a:solidFill>
+                            <a:srgbClr val="2B3A4D"/>
+                          </a:solidFill>
+                          <a:latin typeface="Inter" pitchFamily="34" charset="0"/>
+                          <a:ea typeface="Inter" pitchFamily="34" charset="-122"/>
+                          <a:cs typeface="Inter" pitchFamily="34" charset="-120"/>
+                        </a:rPr>
+                        <a:t>)</a:t>
                       </a:r>
                       <a:endParaRPr lang="en-US" sz="1650" dirty="0">
                         <a:latin typeface="Inter" charset="0"/>
@@ -19299,7 +19322,7 @@
                           <a:ea typeface="Inter" pitchFamily="34" charset="-122"/>
                           <a:cs typeface="Inter" pitchFamily="34" charset="-120"/>
                         </a:rPr>
-                        <a:t>This thesis</a:t>
+                        <a:t>This thesis (only with rules)</a:t>
                       </a:r>
                       <a:endParaRPr lang="en-US" sz="1650" dirty="0">
                         <a:latin typeface="Inter" charset="0"/>

--- a/04_Result/presentation.pptx
+++ b/04_Result/presentation.pptx
@@ -1968,7 +1968,7 @@
         </p:nvSpPr>
         <p:spPr>
           <a:xfrm>
-            <a:off x="0" y="0"/>
+            <a:off x="0" y="10160"/>
             <a:ext cx="18288000" cy="10287000"/>
           </a:xfrm>
           <a:prstGeom prst="rect">
@@ -17245,7 +17245,7 @@
         </p:nvSpPr>
         <p:spPr>
           <a:xfrm>
-            <a:off x="0" y="0"/>
+            <a:off x="0" y="10160"/>
             <a:ext cx="18288000" cy="10287000"/>
           </a:xfrm>
           <a:prstGeom prst="rect">
@@ -22254,7 +22254,7 @@
         </p:nvSpPr>
         <p:spPr>
           <a:xfrm>
-            <a:off x="0" y="0"/>
+            <a:off x="0" y="30480"/>
             <a:ext cx="18288000" cy="10287000"/>
           </a:xfrm>
           <a:prstGeom prst="rect">
